--- a/03-powerpoint-ai/Module03_Trainer_Deck.pptx
+++ b/03-powerpoint-ai/Module03_Trainer_Deck.pptx
@@ -113,6 +113,11 @@
       </a:defRPr>
     </a:lvl9pPr>
   </p:defaultTextStyle>
+  <p:extLst>
+    <p:ext uri="{EFAFB233-063F-42B5-8137-9DF3F51BA10A}">
+      <p15:sldGuideLst xmlns:p15="http://schemas.microsoft.com/office/powerpoint/2012/main"/>
+    </p:ext>
+  </p:extLst>
 </p:presentation>
 </file>
 
@@ -1493,7 +1498,29 @@
                 <a:ea typeface="Georgia" pitchFamily="34" charset="-122"/>
                 <a:cs typeface="Georgia" pitchFamily="34" charset="-120"/>
               </a:rPr>
-              <a:t>Module 03 — Improving Slide Content</a:t>
+              <a:t>Module 03</a:t>
+            </a:r>
+            <a:r>
+              <a:rPr lang="en-US" sz="3600" b="1">
+                <a:solidFill>
+                  <a:srgbClr val="FFFFFF"/>
+                </a:solidFill>
+                <a:latin typeface="Georgia" pitchFamily="34" charset="0"/>
+                <a:ea typeface="Georgia" pitchFamily="34" charset="-122"/>
+                <a:cs typeface="Georgia" pitchFamily="34" charset="-120"/>
+              </a:rPr>
+              <a:t>,</a:t>
+            </a:r>
+            <a:r>
+              <a:rPr lang="en-US" sz="3600" b="1" dirty="0">
+                <a:solidFill>
+                  <a:srgbClr val="FFFFFF"/>
+                </a:solidFill>
+                <a:latin typeface="Georgia" pitchFamily="34" charset="0"/>
+                <a:ea typeface="Georgia" pitchFamily="34" charset="-122"/>
+                <a:cs typeface="Georgia" pitchFamily="34" charset="-120"/>
+              </a:rPr>
+              <a:t> Improving Slide Content</a:t>
             </a:r>
             <a:endParaRPr lang="en-US" sz="3600" dirty="0"/>
           </a:p>
@@ -1655,7 +1682,7 @@
               <a:buNone/>
             </a:pPr>
             <a:r>
-              <a:rPr lang="en-US" sz="3400" b="1" dirty="0">
+              <a:rPr lang="en-US" sz="3400" b="1">
                 <a:solidFill>
                   <a:srgbClr val="FFFFFF"/>
                 </a:solidFill>
@@ -1663,7 +1690,7 @@
                 <a:ea typeface="Georgia" pitchFamily="34" charset="-122"/>
                 <a:cs typeface="Georgia" pitchFamily="34" charset="-120"/>
               </a:rPr>
-              <a:t>Module 03 covered</a:t>
+              <a:t>Fix the titles. Trim the bullets. The rest is practice.</a:t>
             </a:r>
             <a:endParaRPr lang="en-US" sz="3400" dirty="0"/>
           </a:p>
@@ -1819,7 +1846,29 @@
                 <a:ea typeface="Calibri" pitchFamily="34" charset="-122"/>
                 <a:cs typeface="Calibri" pitchFamily="34" charset="-120"/>
               </a:rPr>
-              <a:t>AI trimming is a starting point — always edit the output</a:t>
+              <a:t>AI trimming is a starting point</a:t>
+            </a:r>
+            <a:r>
+              <a:rPr lang="en-US" sz="2200">
+                <a:solidFill>
+                  <a:srgbClr val="FFFFFF"/>
+                </a:solidFill>
+                <a:latin typeface="Calibri" pitchFamily="34" charset="0"/>
+                <a:ea typeface="Calibri" pitchFamily="34" charset="-122"/>
+                <a:cs typeface="Calibri" pitchFamily="34" charset="-120"/>
+              </a:rPr>
+              <a:t>, so</a:t>
+            </a:r>
+            <a:r>
+              <a:rPr lang="en-US" sz="2200" dirty="0">
+                <a:solidFill>
+                  <a:srgbClr val="FFFFFF"/>
+                </a:solidFill>
+                <a:latin typeface="Calibri" pitchFamily="34" charset="0"/>
+                <a:ea typeface="Calibri" pitchFamily="34" charset="-122"/>
+                <a:cs typeface="Calibri" pitchFamily="34" charset="-120"/>
+              </a:rPr>
+              <a:t> always edit the output</a:t>
             </a:r>
             <a:endParaRPr lang="en-US" sz="2200" dirty="0"/>
           </a:p>
@@ -3472,7 +3521,29 @@
                 <a:ea typeface="Calibri" pitchFamily="34" charset="-122"/>
                 <a:cs typeface="Calibri" pitchFamily="34" charset="-120"/>
               </a:rPr>
-              <a:t>Vague prompts produce vague results — give AI the context it needs</a:t>
+              <a:t>Vague prompts produce vague results</a:t>
+            </a:r>
+            <a:r>
+              <a:rPr lang="en-US" sz="1500">
+                <a:solidFill>
+                  <a:srgbClr val="5A6577"/>
+                </a:solidFill>
+                <a:latin typeface="Calibri" pitchFamily="34" charset="0"/>
+                <a:ea typeface="Calibri" pitchFamily="34" charset="-122"/>
+                <a:cs typeface="Calibri" pitchFamily="34" charset="-120"/>
+              </a:rPr>
+              <a:t>. Give</a:t>
+            </a:r>
+            <a:r>
+              <a:rPr lang="en-US" sz="1500" dirty="0">
+                <a:solidFill>
+                  <a:srgbClr val="5A6577"/>
+                </a:solidFill>
+                <a:latin typeface="Calibri" pitchFamily="34" charset="0"/>
+                <a:ea typeface="Calibri" pitchFamily="34" charset="-122"/>
+                <a:cs typeface="Calibri" pitchFamily="34" charset="-120"/>
+              </a:rPr>
+              <a:t> AI the context it needs</a:t>
             </a:r>
             <a:endParaRPr lang="en-US" sz="1500" dirty="0"/>
           </a:p>
@@ -4918,7 +4989,29 @@
                 <a:ea typeface="Georgia" pitchFamily="34" charset="-122"/>
                 <a:cs typeface="Georgia" pitchFamily="34" charset="-120"/>
               </a:rPr>
-              <a:t>Designer fixes layout — it cannot fix a bad message</a:t>
+              <a:t>Designer fixes layout</a:t>
+            </a:r>
+            <a:r>
+              <a:rPr lang="en-US" sz="2800" b="1">
+                <a:solidFill>
+                  <a:srgbClr val="1A3055"/>
+                </a:solidFill>
+                <a:latin typeface="Georgia" pitchFamily="34" charset="0"/>
+                <a:ea typeface="Georgia" pitchFamily="34" charset="-122"/>
+                <a:cs typeface="Georgia" pitchFamily="34" charset="-120"/>
+              </a:rPr>
+              <a:t>, but</a:t>
+            </a:r>
+            <a:r>
+              <a:rPr lang="en-US" sz="2800" b="1" dirty="0">
+                <a:solidFill>
+                  <a:srgbClr val="1A3055"/>
+                </a:solidFill>
+                <a:latin typeface="Georgia" pitchFamily="34" charset="0"/>
+                <a:ea typeface="Georgia" pitchFamily="34" charset="-122"/>
+                <a:cs typeface="Georgia" pitchFamily="34" charset="-120"/>
+              </a:rPr>
+              <a:t> it cannot fix a bad message</a:t>
             </a:r>
             <a:endParaRPr lang="en-US" sz="2800" dirty="0"/>
           </a:p>
@@ -5055,15 +5148,75 @@
           <a:bodyPr wrap="square" rtlCol="0" anchor="ctr"/>
           <a:lstStyle/>
           <a:p>
+            <a:pPr marL="0" indent="0">
+              <a:spcAft>
+                <a:spcPts val="400"/>
+              </a:spcAft>
+              <a:buNone/>
+            </a:pPr>
+            <a:r>
+              <a:rPr lang="en-US" sz="1100" b="1">
+                <a:solidFill>
+                  <a:srgbClr val="6B2020"/>
+                </a:solidFill>
+                <a:latin typeface="Georgia" pitchFamily="34" charset="0"/>
+                <a:ea typeface="Georgia" pitchFamily="34" charset="-122"/>
+                <a:cs typeface="Georgia" pitchFamily="34" charset="-120"/>
+              </a:rPr>
+              <a:t>Q3 Revenue Results</a:t>
+            </a:r>
+            <a:endParaRPr lang="en-US" sz="1100"/>
+          </a:p>
+          <a:p>
+            <a:pPr marL="0" indent="0">
+              <a:spcAft>
+                <a:spcPts val="400"/>
+              </a:spcAft>
+              <a:buNone/>
+            </a:pPr>
+            <a:r>
+              <a:rPr lang="en-US" sz="1000">
+                <a:solidFill>
+                  <a:srgbClr val="999999"/>
+                </a:solidFill>
+                <a:latin typeface="Calibri" pitchFamily="34" charset="0"/>
+                <a:ea typeface="Calibri" pitchFamily="34" charset="-122"/>
+                <a:cs typeface="Calibri" pitchFamily="34" charset="-120"/>
+              </a:rPr>
+              <a:t>[ Stock Photo ]</a:t>
+            </a:r>
+            <a:endParaRPr lang="en-US" sz="1000"/>
+          </a:p>
+          <a:p>
+            <a:pPr marL="0" indent="0">
+              <a:spcAft>
+                <a:spcPts val="200"/>
+              </a:spcAft>
+              <a:buNone/>
+            </a:pPr>
+            <a:r>
+              <a:rPr lang="en-US" sz="900">
+                <a:solidFill>
+                  <a:srgbClr val="999999"/>
+                </a:solidFill>
+                <a:latin typeface="Calibri" pitchFamily="34" charset="0"/>
+                <a:ea typeface="Calibri" pitchFamily="34" charset="-122"/>
+                <a:cs typeface="Calibri" pitchFamily="34" charset="-120"/>
+              </a:rPr>
+              <a:t>★ ★ ★  decorative icons</a:t>
+            </a:r>
+            <a:endParaRPr lang="en-US" sz="900"/>
+          </a:p>
+          <a:p>
             <a:pPr marL="342900" indent="-342900">
               <a:spcAft>
-                <a:spcPts val="800"/>
+                <a:spcPts val="200"/>
               </a:spcAft>
               <a:buSzPct val="100000"/>
               <a:buChar char="•"/>
             </a:pPr>
             <a:r>
-              <a:rPr lang="en-US" sz="1300" dirty="0">
+              <a:rPr lang="en-US" sz="900">
                 <a:solidFill>
                   <a:srgbClr val="6B2020"/>
                 </a:solidFill>
@@ -5071,20 +5224,20 @@
                 <a:ea typeface="Calibri" pitchFamily="34" charset="-122"/>
                 <a:cs typeface="Calibri" pitchFamily="34" charset="-120"/>
               </a:rPr>
-              <a:t>Generic topic-label title</a:t>
-            </a:r>
-            <a:endParaRPr lang="en-US" sz="1300" dirty="0"/>
+              <a:t>Revenue target was RM 3.8M</a:t>
+            </a:r>
+            <a:endParaRPr lang="en-US" sz="900"/>
           </a:p>
           <a:p>
             <a:pPr marL="342900" indent="-342900">
               <a:spcAft>
-                <a:spcPts val="800"/>
+                <a:spcPts val="200"/>
               </a:spcAft>
               <a:buSzPct val="100000"/>
               <a:buChar char="•"/>
             </a:pPr>
             <a:r>
-              <a:rPr lang="en-US" sz="1300" dirty="0">
+              <a:rPr lang="en-US" sz="900">
                 <a:solidFill>
                   <a:srgbClr val="6B2020"/>
                 </a:solidFill>
@@ -5092,20 +5245,20 @@
                 <a:ea typeface="Calibri" pitchFamily="34" charset="-122"/>
                 <a:cs typeface="Calibri" pitchFamily="34" charset="-120"/>
               </a:rPr>
-              <a:t>8 bullet points, each 20+ words</a:t>
-            </a:r>
-            <a:endParaRPr lang="en-US" sz="1300" dirty="0"/>
+              <a:t>Exceeded by 10%</a:t>
+            </a:r>
+            <a:endParaRPr lang="en-US" sz="900"/>
           </a:p>
           <a:p>
             <a:pPr marL="342900" indent="-342900">
               <a:spcAft>
-                <a:spcPts val="800"/>
+                <a:spcPts val="200"/>
               </a:spcAft>
               <a:buSzPct val="100000"/>
               <a:buChar char="•"/>
             </a:pPr>
             <a:r>
-              <a:rPr lang="en-US" sz="1300" dirty="0">
+              <a:rPr lang="en-US" sz="900">
                 <a:solidFill>
                   <a:srgbClr val="6B2020"/>
                 </a:solidFill>
@@ -5113,20 +5266,19 @@
                 <a:ea typeface="Calibri" pitchFamily="34" charset="-122"/>
                 <a:cs typeface="Calibri" pitchFamily="34" charset="-120"/>
               </a:rPr>
-              <a:t>Stock photo taking 40% of the slide</a:t>
-            </a:r>
-            <a:endParaRPr lang="en-US" sz="1300" dirty="0"/>
-          </a:p>
-          <a:p>
-            <a:pPr marL="342900" indent="-342900">
-              <a:spcAft>
-                <a:spcPts val="800"/>
-              </a:spcAft>
-              <a:buSzPct val="100000"/>
-              <a:buChar char="•"/>
-            </a:pPr>
-            <a:r>
-              <a:rPr lang="en-US" sz="1300" dirty="0">
+              <a:t>Second consecutive quarter above target</a:t>
+            </a:r>
+            <a:endParaRPr lang="en-US" sz="900"/>
+          </a:p>
+          <a:p>
+            <a:pPr marL="0" indent="0">
+              <a:spcBef>
+                <a:spcPts val="400"/>
+              </a:spcBef>
+              <a:buNone/>
+            </a:pPr>
+            <a:r>
+              <a:rPr lang="en-US" sz="900" i="1">
                 <a:solidFill>
                   <a:srgbClr val="6B2020"/>
                 </a:solidFill>
@@ -5134,20 +5286,16 @@
                 <a:ea typeface="Calibri" pitchFamily="34" charset="-122"/>
                 <a:cs typeface="Calibri" pitchFamily="34" charset="-120"/>
               </a:rPr>
-              <a:t>Three decorative icons with no meaning</a:t>
-            </a:r>
-            <a:endParaRPr lang="en-US" sz="1300" dirty="0"/>
-          </a:p>
-          <a:p>
-            <a:pPr marL="342900" indent="-342900">
-              <a:spcAft>
-                <a:spcPts val="800"/>
-              </a:spcAft>
-              <a:buSzPct val="100000"/>
-              <a:buChar char="•"/>
-            </a:pPr>
-            <a:r>
-              <a:rPr lang="en-US" sz="1300" dirty="0">
+              <a:t>Content squeezed around the photo,</a:t>
+            </a:r>
+            <a:endParaRPr lang="en-US" sz="900"/>
+          </a:p>
+          <a:p>
+            <a:pPr marL="0" indent="0">
+              <a:buNone/>
+            </a:pPr>
+            <a:r>
+              <a:rPr lang="en-US" sz="900" i="1">
                 <a:solidFill>
                   <a:srgbClr val="6B2020"/>
                 </a:solidFill>
@@ -5155,30 +5303,9 @@
                 <a:ea typeface="Calibri" pitchFamily="34" charset="-122"/>
                 <a:cs typeface="Calibri" pitchFamily="34" charset="-120"/>
               </a:rPr>
-              <a:t>Small font to fit everything in</a:t>
-            </a:r>
-            <a:endParaRPr lang="en-US" sz="1300" dirty="0"/>
-          </a:p>
-          <a:p>
-            <a:pPr marL="342900" indent="-342900">
-              <a:spcAft>
-                <a:spcPts val="800"/>
-              </a:spcAft>
-              <a:buSzPct val="100000"/>
-              <a:buChar char="•"/>
-            </a:pPr>
-            <a:r>
-              <a:rPr lang="en-US" sz="1300" dirty="0">
-                <a:solidFill>
-                  <a:srgbClr val="6B2020"/>
-                </a:solidFill>
-                <a:latin typeface="Calibri" pitchFamily="34" charset="0"/>
-                <a:ea typeface="Calibri" pitchFamily="34" charset="-122"/>
-                <a:cs typeface="Calibri" pitchFamily="34" charset="-120"/>
-              </a:rPr>
-              <a:t>No clear message or hierarchy</a:t>
-            </a:r>
-            <a:endParaRPr lang="en-US" sz="1300" dirty="0"/>
+              <a:t>small font, no visual hierarchy</a:t>
+            </a:r>
+            <a:endParaRPr lang="en-US" sz="900"/>
           </a:p>
         </p:txBody>
       </p:sp>
@@ -5274,15 +5401,55 @@
           <a:bodyPr wrap="square" rtlCol="0" anchor="ctr"/>
           <a:lstStyle/>
           <a:p>
+            <a:pPr marL="0" indent="0">
+              <a:spcAft>
+                <a:spcPts val="600"/>
+              </a:spcAft>
+              <a:buNone/>
+            </a:pPr>
+            <a:r>
+              <a:rPr lang="en-US" sz="1100" b="1">
+                <a:solidFill>
+                  <a:srgbClr val="1E4A1E"/>
+                </a:solidFill>
+                <a:latin typeface="Georgia" pitchFamily="34" charset="0"/>
+                <a:ea typeface="Georgia" pitchFamily="34" charset="-122"/>
+                <a:cs typeface="Georgia" pitchFamily="34" charset="-120"/>
+              </a:rPr>
+              <a:t>Revenue exceeded target for Q2</a:t>
+            </a:r>
+            <a:endParaRPr lang="en-US" sz="1100"/>
+          </a:p>
+          <a:p>
+            <a:pPr marL="0" indent="0">
+              <a:spcAft>
+                <a:spcPts val="600"/>
+              </a:spcAft>
+              <a:buNone/>
+            </a:pPr>
+            <a:r>
+              <a:rPr lang="en-US" sz="2400" b="1">
+                <a:solidFill>
+                  <a:srgbClr val="1E4A1E"/>
+                </a:solidFill>
+                <a:latin typeface="Georgia" pitchFamily="34" charset="0"/>
+                <a:ea typeface="Georgia" pitchFamily="34" charset="-122"/>
+                <a:cs typeface="Georgia" pitchFamily="34" charset="-120"/>
+              </a:rPr>
+              <a:t>RM 4.2M</a:t>
+            </a:r>
+            <a:endParaRPr lang="en-US" sz="2400"/>
+          </a:p>
+          <a:p>
             <a:pPr marL="342900" indent="-342900">
               <a:spcAft>
-                <a:spcPts val="800"/>
+                <a:spcPts val="400"/>
               </a:spcAft>
               <a:buSzPct val="100000"/>
               <a:buChar char="•"/>
             </a:pPr>
             <a:r>
-              <a:rPr lang="en-US" sz="1300" dirty="0">
+              <a:rPr lang="en-US" sz="1100">
                 <a:solidFill>
                   <a:srgbClr val="1E4A1E"/>
                 </a:solidFill>
@@ -5290,20 +5457,20 @@
                 <a:ea typeface="Calibri" pitchFamily="34" charset="-122"/>
                 <a:cs typeface="Calibri" pitchFamily="34" charset="-120"/>
               </a:rPr>
-              <a:t>Title states the main point</a:t>
-            </a:r>
-            <a:endParaRPr lang="en-US" sz="1300" dirty="0"/>
+              <a:t>Revenue target was RM 3.8M</a:t>
+            </a:r>
+            <a:endParaRPr lang="en-US" sz="1100"/>
           </a:p>
           <a:p>
             <a:pPr marL="342900" indent="-342900">
               <a:spcAft>
-                <a:spcPts val="800"/>
+                <a:spcPts val="400"/>
               </a:spcAft>
               <a:buSzPct val="100000"/>
               <a:buChar char="•"/>
             </a:pPr>
             <a:r>
-              <a:rPr lang="en-US" sz="1300" dirty="0">
+              <a:rPr lang="en-US" sz="1100">
                 <a:solidFill>
                   <a:srgbClr val="1E4A1E"/>
                 </a:solidFill>
@@ -5311,20 +5478,20 @@
                 <a:ea typeface="Calibri" pitchFamily="34" charset="-122"/>
                 <a:cs typeface="Calibri" pitchFamily="34" charset="-120"/>
               </a:rPr>
-              <a:t>3 bullets, each under 10 words</a:t>
-            </a:r>
-            <a:endParaRPr lang="en-US" sz="1300" dirty="0"/>
+              <a:t>Exceeded by 10%</a:t>
+            </a:r>
+            <a:endParaRPr lang="en-US" sz="1100"/>
           </a:p>
           <a:p>
             <a:pPr marL="342900" indent="-342900">
               <a:spcAft>
-                <a:spcPts val="800"/>
+                <a:spcPts val="400"/>
               </a:spcAft>
               <a:buSzPct val="100000"/>
               <a:buChar char="•"/>
             </a:pPr>
             <a:r>
-              <a:rPr lang="en-US" sz="1300" dirty="0">
+              <a:rPr lang="en-US" sz="1100">
                 <a:solidFill>
                   <a:srgbClr val="1E4A1E"/>
                 </a:solidFill>
@@ -5332,20 +5499,19 @@
                 <a:ea typeface="Calibri" pitchFamily="34" charset="-122"/>
                 <a:cs typeface="Calibri" pitchFamily="34" charset="-120"/>
               </a:rPr>
-              <a:t>No stock photos or clip art</a:t>
-            </a:r>
-            <a:endParaRPr lang="en-US" sz="1300" dirty="0"/>
-          </a:p>
-          <a:p>
-            <a:pPr marL="342900" indent="-342900">
-              <a:spcAft>
-                <a:spcPts val="800"/>
-              </a:spcAft>
-              <a:buSzPct val="100000"/>
-              <a:buChar char="•"/>
-            </a:pPr>
-            <a:r>
-              <a:rPr lang="en-US" sz="1300" dirty="0">
+              <a:t>Second consecutive quarter above target</a:t>
+            </a:r>
+            <a:endParaRPr lang="en-US" sz="1100"/>
+          </a:p>
+          <a:p>
+            <a:pPr marL="0" indent="0">
+              <a:spcBef>
+                <a:spcPts val="600"/>
+              </a:spcBef>
+              <a:buNone/>
+            </a:pPr>
+            <a:r>
+              <a:rPr lang="en-US" sz="1000" i="1">
                 <a:solidFill>
                   <a:srgbClr val="1E4A1E"/>
                 </a:solidFill>
@@ -5353,20 +5519,16 @@
                 <a:ea typeface="Calibri" pitchFamily="34" charset="-122"/>
                 <a:cs typeface="Calibri" pitchFamily="34" charset="-120"/>
               </a:rPr>
-              <a:t>Clean white space around content</a:t>
-            </a:r>
-            <a:endParaRPr lang="en-US" sz="1300" dirty="0"/>
-          </a:p>
-          <a:p>
-            <a:pPr marL="342900" indent="-342900">
-              <a:spcAft>
-                <a:spcPts val="800"/>
-              </a:spcAft>
-              <a:buSzPct val="100000"/>
-              <a:buChar char="•"/>
-            </a:pPr>
-            <a:r>
-              <a:rPr lang="en-US" sz="1300" dirty="0">
+              <a:t>No photo, no icons, full width,</a:t>
+            </a:r>
+            <a:endParaRPr lang="en-US" sz="1000"/>
+          </a:p>
+          <a:p>
+            <a:pPr marL="0" indent="0">
+              <a:buNone/>
+            </a:pPr>
+            <a:r>
+              <a:rPr lang="en-US" sz="1000" i="1">
                 <a:solidFill>
                   <a:srgbClr val="1E4A1E"/>
                 </a:solidFill>
@@ -5374,30 +5536,9 @@
                 <a:ea typeface="Calibri" pitchFamily="34" charset="-122"/>
                 <a:cs typeface="Calibri" pitchFamily="34" charset="-120"/>
               </a:rPr>
-              <a:t>Readable font size throughout</a:t>
-            </a:r>
-            <a:endParaRPr lang="en-US" sz="1300" dirty="0"/>
-          </a:p>
-          <a:p>
-            <a:pPr marL="342900" indent="-342900">
-              <a:spcAft>
-                <a:spcPts val="800"/>
-              </a:spcAft>
-              <a:buSzPct val="100000"/>
-              <a:buChar char="•"/>
-            </a:pPr>
-            <a:r>
-              <a:rPr lang="en-US" sz="1300" dirty="0">
-                <a:solidFill>
-                  <a:srgbClr val="1E4A1E"/>
-                </a:solidFill>
-                <a:latin typeface="Calibri" pitchFamily="34" charset="0"/>
-                <a:ea typeface="Calibri" pitchFamily="34" charset="-122"/>
-                <a:cs typeface="Calibri" pitchFamily="34" charset="-120"/>
-              </a:rPr>
-              <a:t>One clear takeaway per slide</a:t>
-            </a:r>
-            <a:endParaRPr lang="en-US" sz="1300" dirty="0"/>
+              <a:t>clear hierarchy, readable font</a:t>
+            </a:r>
+            <a:endParaRPr lang="en-US" sz="1000"/>
           </a:p>
         </p:txBody>
       </p:sp>
@@ -5695,7 +5836,29 @@
                 <a:ea typeface="Georgia" pitchFamily="34" charset="-122"/>
                 <a:cs typeface="Georgia" pitchFamily="34" charset="-120"/>
               </a:rPr>
-              <a:t>Good speaker notes have three parts — not a full script</a:t>
+              <a:t>Good speaker notes have three parts</a:t>
+            </a:r>
+            <a:r>
+              <a:rPr lang="en-US" sz="2800" b="1">
+                <a:solidFill>
+                  <a:srgbClr val="1A3055"/>
+                </a:solidFill>
+                <a:latin typeface="Georgia" pitchFamily="34" charset="0"/>
+                <a:ea typeface="Georgia" pitchFamily="34" charset="-122"/>
+                <a:cs typeface="Georgia" pitchFamily="34" charset="-120"/>
+              </a:rPr>
+              <a:t>,</a:t>
+            </a:r>
+            <a:r>
+              <a:rPr lang="en-US" sz="2800" b="1" dirty="0">
+                <a:solidFill>
+                  <a:srgbClr val="1A3055"/>
+                </a:solidFill>
+                <a:latin typeface="Georgia" pitchFamily="34" charset="0"/>
+                <a:ea typeface="Georgia" pitchFamily="34" charset="-122"/>
+                <a:cs typeface="Georgia" pitchFamily="34" charset="-120"/>
+              </a:rPr>
+              <a:t> not a full script</a:t>
             </a:r>
             <a:endParaRPr lang="en-US" sz="2800" dirty="0"/>
           </a:p>
@@ -6388,7 +6551,29 @@
                 <a:ea typeface="Georgia" pitchFamily="34" charset="-122"/>
                 <a:cs typeface="Georgia" pitchFamily="34" charset="-120"/>
               </a:rPr>
-              <a:t>Your turn — apply this to the before deck</a:t>
+              <a:t>Your turn</a:t>
+            </a:r>
+            <a:r>
+              <a:rPr lang="en-US" sz="3000" b="1">
+                <a:solidFill>
+                  <a:srgbClr val="1A3055"/>
+                </a:solidFill>
+                <a:latin typeface="Georgia" pitchFamily="34" charset="0"/>
+                <a:ea typeface="Georgia" pitchFamily="34" charset="-122"/>
+                <a:cs typeface="Georgia" pitchFamily="34" charset="-120"/>
+              </a:rPr>
+              <a:t>. Apply</a:t>
+            </a:r>
+            <a:r>
+              <a:rPr lang="en-US" sz="3000" b="1" dirty="0">
+                <a:solidFill>
+                  <a:srgbClr val="1A3055"/>
+                </a:solidFill>
+                <a:latin typeface="Georgia" pitchFamily="34" charset="0"/>
+                <a:ea typeface="Georgia" pitchFamily="34" charset="-122"/>
+                <a:cs typeface="Georgia" pitchFamily="34" charset="-120"/>
+              </a:rPr>
+              <a:t> this to the before deck</a:t>
             </a:r>
             <a:endParaRPr lang="en-US" sz="3000" dirty="0"/>
           </a:p>
@@ -6715,7 +6900,29 @@
                 <a:ea typeface="Calibri" pitchFamily="34" charset="-122"/>
                 <a:cs typeface="Calibri" pitchFamily="34" charset="-120"/>
               </a:rPr>
-              <a:t>Each bullet under 10 words — cut detail into speaker notes</a:t>
+              <a:t>Each bullet under 10 words</a:t>
+            </a:r>
+            <a:r>
+              <a:rPr lang="en-US" sz="1300">
+                <a:solidFill>
+                  <a:srgbClr val="5A6577"/>
+                </a:solidFill>
+                <a:latin typeface="Calibri" pitchFamily="34" charset="0"/>
+                <a:ea typeface="Calibri" pitchFamily="34" charset="-122"/>
+                <a:cs typeface="Calibri" pitchFamily="34" charset="-120"/>
+              </a:rPr>
+              <a:t>. Cut</a:t>
+            </a:r>
+            <a:r>
+              <a:rPr lang="en-US" sz="1300" dirty="0">
+                <a:solidFill>
+                  <a:srgbClr val="5A6577"/>
+                </a:solidFill>
+                <a:latin typeface="Calibri" pitchFamily="34" charset="0"/>
+                <a:ea typeface="Calibri" pitchFamily="34" charset="-122"/>
+                <a:cs typeface="Calibri" pitchFamily="34" charset="-120"/>
+              </a:rPr>
+              <a:t> detail into speaker notes</a:t>
             </a:r>
             <a:endParaRPr lang="en-US" sz="1300" dirty="0"/>
           </a:p>
